--- a/STUDENT-GUIDES/Cyber_Defense_KQL_Workshop_v2.pptx
+++ b/STUDENT-GUIDES/Cyber_Defense_KQL_Workshop_v2.pptx
@@ -20902,7 +20902,7 @@
         <p:spPr>
           <a:xfrm>
             <a:off x="786384" y="2075688"/>
-            <a:ext cx="6025896" cy="971869"/>
+            <a:ext cx="6025896" cy="1170513"/>
           </a:xfrm>
           <a:prstGeom prst="rect">
             <a:avLst/>
@@ -21042,6 +21042,36 @@
                 <a:cs typeface="Consolas"/>
               </a:rPr>
               <a:t>(</a:t>
+            </a:r>
+          </a:p>
+          <a:p>
+            <a:pPr>
+              <a:lnSpc>
+                <a:spcPct val="105000"/>
+              </a:lnSpc>
+              <a:spcAft>
+                <a:spcPts val="100"/>
+              </a:spcAft>
+            </a:pPr>
+            <a:r>
+              <a:rPr lang="en-US" sz="1150" dirty="0">
+                <a:solidFill>
+                  <a:srgbClr val="A9B2BD"/>
+                </a:solidFill>
+                <a:latin typeface="Consolas"/>
+                <a:cs typeface="Consolas"/>
+              </a:rPr>
+              <a:t>  </a:t>
+            </a:r>
+            <a:r>
+              <a:rPr lang="en-US" sz="1150" dirty="0" err="1">
+                <a:solidFill>
+                  <a:srgbClr val="2F81F7"/>
+                </a:solidFill>
+                <a:latin typeface="Consolas"/>
+                <a:cs typeface="Consolas"/>
+              </a:rPr>
+              <a:t>AlertEvidence</a:t>
             </a:r>
             <a:endParaRPr lang="en-US" sz="1150" dirty="0">
               <a:solidFill>
@@ -22362,7 +22392,7 @@
         </p:nvSpPr>
         <p:spPr>
           <a:xfrm>
-            <a:off x="566928" y="1554480"/>
+            <a:off x="566928" y="1529768"/>
             <a:ext cx="4572000" cy="4480560"/>
           </a:xfrm>
           <a:prstGeom prst="rect">

--- a/STUDENT-GUIDES/Cyber_Defense_KQL_Workshop_v2.pptx
+++ b/STUDENT-GUIDES/Cyber_Defense_KQL_Workshop_v2.pptx
@@ -38024,7 +38024,7 @@
         <p:spPr>
           <a:xfrm>
             <a:off x="612648" y="1920240"/>
-            <a:ext cx="1382050" cy="640080"/>
+            <a:ext cx="1382050" cy="169277"/>
           </a:xfrm>
           <a:prstGeom prst="rect">
             <a:avLst/>
@@ -38049,9 +38049,9 @@
               </a:spcAft>
             </a:pPr>
             <a:r>
-              <a:rPr sz="1100" b="1" i="0">
-                <a:solidFill>
-                  <a:srgbClr val="8A93A0"/>
+              <a:rPr sz="1100" b="1" i="0" dirty="0">
+                <a:solidFill>
+                  <a:schemeClr val="accent6"/>
                 </a:solidFill>
                 <a:latin typeface="Consolas"/>
                 <a:cs typeface="Consolas"/>
@@ -38209,7 +38209,7 @@
         <p:spPr>
           <a:xfrm>
             <a:off x="2195866" y="1920240"/>
-            <a:ext cx="1382050" cy="640080"/>
+            <a:ext cx="1382050" cy="169277"/>
           </a:xfrm>
           <a:prstGeom prst="rect">
             <a:avLst/>
@@ -38234,9 +38234,11 @@
               </a:spcAft>
             </a:pPr>
             <a:r>
-              <a:rPr sz="1100" b="1" i="0">
-                <a:solidFill>
-                  <a:srgbClr val="8A93A0"/>
+              <a:rPr sz="1100" b="1" i="0" dirty="0">
+                <a:solidFill>
+                  <a:schemeClr val="accent3">
+                    <a:lumMod val="75000"/>
+                  </a:schemeClr>
                 </a:solidFill>
                 <a:latin typeface="Consolas"/>
                 <a:cs typeface="Consolas"/>

--- a/STUDENT-GUIDES/Cyber_Defense_KQL_Workshop_v2.pptx
+++ b/STUDENT-GUIDES/Cyber_Defense_KQL_Workshop_v2.pptx
@@ -32536,7 +32536,7 @@
                 <a:latin typeface="Consolas"/>
                 <a:cs typeface="Consolas"/>
               </a:rPr>
-              <a:t>TODAY // 60 MINUTES</a:t>
+              <a:t>TODAY // 120 MINUTES</a:t>
             </a:r>
           </a:p>
         </p:txBody>
@@ -33072,7 +33072,7 @@
                 <a:latin typeface="Segoe UI"/>
                 <a:cs typeface="Segoe UI"/>
               </a:rPr>
-              <a:t>Acts 0-5: phish, device code, risky sign-in, OAuth consent, Graph.</a:t>
+              <a:t>Acts 2-5: phish, device code, risky sign-in, OAuth consent, Graph.</a:t>
             </a:r>
           </a:p>
         </p:txBody>
@@ -33118,7 +33118,7 @@
                 <a:latin typeface="Consolas"/>
                 <a:cs typeface="Consolas"/>
               </a:rPr>
-              <a:t>15m</a:t>
+              <a:t>40m</a:t>
             </a:r>
           </a:p>
         </p:txBody>
@@ -33349,7 +33349,7 @@
                 <a:latin typeface="Consolas"/>
                 <a:cs typeface="Consolas"/>
               </a:rPr>
-              <a:t>15m</a:t>
+              <a:t>30m</a:t>
             </a:r>
           </a:p>
         </p:txBody>
@@ -33580,7 +33580,7 @@
                 <a:latin typeface="Consolas"/>
                 <a:cs typeface="Consolas"/>
               </a:rPr>
-              <a:t>15m</a:t>
+              <a:t>35m</a:t>
             </a:r>
           </a:p>
         </p:txBody>
